--- a/thesis/presentations/chapter01_defence.pptx
+++ b/thesis/presentations/chapter01_defence.pptx
@@ -7516,7 +7516,7 @@
                 </a:solidFill>
                 <a:latin typeface="Calibri"/>
               </a:rPr>
-              <a:t>Sensitivity: mean 0.898, median 0.932, from 0.639 at COX2 to 0.997 at CGRP.</a:t>
+              <a:t>Sensitivity: mean 0.764, median 0.835, from 0.303 at GABA-A to 0.993 at CGRP.</a:t>
             </a:r>
           </a:p>
         </p:txBody>
@@ -10101,7 +10101,7 @@
                 </a:solidFill>
                 <a:latin typeface="Calibri"/>
               </a:rPr>
-              <a:t>36 targets fire across approved drugs but span only 16 independent directions; 5 homologous pairs correlate above 0.5</a:t>
+              <a:t>37 targets fire across approved drugs but span only 16 independent directions; 5 homologous pairs correlate above 0.5</a:t>
             </a:r>
           </a:p>
         </p:txBody>
@@ -11541,7 +11541,7 @@
                 </a:solidFill>
                 <a:latin typeface="Cambria"/>
               </a:rPr>
-              <a:t>0.949</a:t>
+              <a:t>0.925</a:t>
             </a:r>
           </a:p>
         </p:txBody>
@@ -11622,7 +11622,7 @@
                 </a:solidFill>
                 <a:latin typeface="Calibri"/>
               </a:rPr>
-              <a:t>95 per cent interval 0.934 to 0.961</a:t>
+              <a:t>95 per cent interval 0.907 to 0.940</a:t>
             </a:r>
           </a:p>
         </p:txBody>
@@ -17579,7 +17579,7 @@
                 </a:solidFill>
                 <a:latin typeface="Calibri"/>
               </a:rPr>
-              <a:t>Because co-engaged targets are frequently homologues, and a sum would count one observation several times. Of the panel, 36 targets fire across approved drugs but span only 16 independent directions.</a:t>
+              <a:t>Because co-engaged targets are frequently homologues, and a sum would count one observation several times. Of the panel, 37 targets fire across approved drugs but span only 16 independent directions.</a:t>
             </a:r>
           </a:p>
         </p:txBody>

--- a/thesis/presentations/chapter01_defence.pptx
+++ b/thesis/presentations/chapter01_defence.pptx
@@ -9511,7 +9511,7 @@
                 </a:solidFill>
                 <a:latin typeface="Cambria"/>
               </a:rPr>
-              <a:t>4 of 9 hypotheses were refuted</a:t>
+              <a:t>4 of 10 hypotheses were refuted</a:t>
             </a:r>
           </a:p>
         </p:txBody>
@@ -10140,7 +10140,7 @@
                 </a:solidFill>
                 <a:latin typeface="Calibri"/>
               </a:rPr>
-              <a:t>4 supported, 1 weakened. The refutations changed the design and are the most useful output the project has produced.</a:t>
+              <a:t>4 supported, 2 weakened. The refutations changed the design and are the most useful output the project has produced.</a:t>
             </a:r>
           </a:p>
         </p:txBody>
@@ -11554,7 +11554,7 @@
         </p:nvSpPr>
         <p:spPr>
           <a:xfrm>
-            <a:off x="978408" y="2651760"/>
+            <a:off x="978408" y="2771140"/>
             <a:ext cx="4114800" cy="658368"/>
           </a:xfrm>
           <a:prstGeom prst="rect">
@@ -14140,7 +14140,7 @@
                 </a:solidFill>
                 <a:latin typeface="Calibri"/>
               </a:rPr>
-              <a:t>9 hypotheses, 4 refuted</a:t>
+              <a:t>10 hypotheses, 4 refuted</a:t>
             </a:r>
           </a:p>
         </p:txBody>

--- a/thesis/presentations/chapter01_defence.pptx
+++ b/thesis/presentations/chapter01_defence.pptx
@@ -8070,7 +8070,7 @@
                 </a:solidFill>
                 <a:latin typeface="Calibri"/>
               </a:rPr>
-              <a:t>Empirical coverage 0.889 to 0.921 against a 0.90 target</a:t>
+              <a:t>Empirical coverage 0.876 to 0.933 against a 0.90 target</a:t>
             </a:r>
           </a:p>
         </p:txBody>
@@ -19488,7 +19488,7 @@
                 </a:solidFill>
                 <a:latin typeface="Calibri"/>
               </a:rPr>
-              <a:t>Every value returned carries a calibrated probability, a conformal coverage statement measured at 0.889 to 0.921 against a 0.90 target, and a distance to the nearest measured analogue.</a:t>
+              <a:t>Every value returned carries a calibrated probability, a conformal coverage statement measured at 0.876 to 0.933 against a 0.90 target, and a distance to the nearest measured analogue.</a:t>
             </a:r>
           </a:p>
         </p:txBody>
